--- a/apps/pitch-site/public/Gentle-Reminder-Pitch-Deck.pptx
+++ b/apps/pitch-site/public/Gentle-Reminder-Pitch-Deck.pptx
@@ -5665,7 +5665,7 @@
                 <a:ea typeface="Arial Black" pitchFamily="34" charset="-122"/>
                 <a:cs typeface="Arial Black" pitchFamily="34" charset="-120"/>
               </a:rPr>
-              <a:t>12</a:t>
+              <a:t>16</a:t>
             </a:r>
             <a:endParaRPr lang="en-US" sz="2800" dirty="0"/>
           </a:p>
@@ -5704,7 +5704,7 @@
                 <a:ea typeface="Calibri" pitchFamily="34" charset="-122"/>
                 <a:cs typeface="Calibri" pitchFamily="34" charset="-120"/>
               </a:rPr>
-              <a:t>FDA SaMD documents</a:t>
+              <a:t>FDA SaMD + IRB documents</a:t>
             </a:r>
             <a:endParaRPr lang="en-US" sz="1200" dirty="0"/>
           </a:p>
@@ -5743,7 +5743,7 @@
                 <a:ea typeface="Calibri" pitchFamily="34" charset="-122"/>
                 <a:cs typeface="Calibri" pitchFamily="34" charset="-120"/>
               </a:rPr>
-              <a:t>IEC 62304, ISO 14971, QMS, Part 11, STRIDE</a:t>
+              <a:t>IEC 62304, ISO 14971, QMS, Part 11, STRIDE, IRB package</a:t>
             </a:r>
             <a:endParaRPr lang="en-US" sz="1000" dirty="0"/>
           </a:p>
@@ -13426,8 +13426,8 @@
         </p:nvSpPr>
         <p:spPr>
           <a:xfrm>
-            <a:off x="548640" y="2651760"/>
-            <a:ext cx="5669280" cy="365760"/>
+            <a:off x="548640" y="2606040"/>
+            <a:ext cx="5669280" cy="274320"/>
           </a:xfrm>
           <a:prstGeom prst="rect">
             <a:avLst/>
@@ -13451,24 +13451,24 @@
         </p:nvSpPr>
         <p:spPr>
           <a:xfrm>
-            <a:off x="731520" y="2651760"/>
-            <a:ext cx="3840480" cy="365760"/>
-          </a:xfrm>
-          <a:prstGeom prst="rect">
-            <a:avLst/>
-          </a:prstGeom>
-          <a:noFill/>
-          <a:ln/>
-        </p:spPr>
-        <p:txBody>
-          <a:bodyPr wrap="square" rtlCol="0" anchor="ctr"/>
-          <a:lstStyle/>
-          <a:p>
-            <a:pPr indent="0" marL="0">
-              <a:buNone/>
-            </a:pPr>
-            <a:r>
-              <a:rPr lang="en-US" sz="1100" dirty="0">
+            <a:off x="731520" y="2606040"/>
+            <a:ext cx="3840480" cy="274320"/>
+          </a:xfrm>
+          <a:prstGeom prst="rect">
+            <a:avLst/>
+          </a:prstGeom>
+          <a:noFill/>
+          <a:ln/>
+        </p:spPr>
+        <p:txBody>
+          <a:bodyPr wrap="square" rtlCol="0" anchor="ctr"/>
+          <a:lstStyle/>
+          <a:p>
+            <a:pPr indent="0" marL="0">
+              <a:buNone/>
+            </a:pPr>
+            <a:r>
+              <a:rPr lang="en-US" sz="1000" dirty="0">
                 <a:solidFill>
                   <a:srgbClr val="C9D1D9"/>
                 </a:solidFill>
@@ -13478,7 +13478,7 @@
               </a:rPr>
               <a:t>IEC 62304 Software Lifecycle</a:t>
             </a:r>
-            <a:endParaRPr lang="en-US" sz="1100" dirty="0"/>
+            <a:endParaRPr lang="en-US" sz="1000" dirty="0"/>
           </a:p>
         </p:txBody>
       </p:sp>
@@ -13490,24 +13490,24 @@
         </p:nvSpPr>
         <p:spPr>
           <a:xfrm>
-            <a:off x="4663440" y="2651760"/>
-            <a:ext cx="1554480" cy="365760"/>
-          </a:xfrm>
-          <a:prstGeom prst="rect">
-            <a:avLst/>
-          </a:prstGeom>
-          <a:noFill/>
-          <a:ln/>
-        </p:spPr>
-        <p:txBody>
-          <a:bodyPr wrap="square" rtlCol="0" anchor="ctr"/>
-          <a:lstStyle/>
-          <a:p>
-            <a:pPr indent="0" marL="0">
-              <a:buNone/>
-            </a:pPr>
-            <a:r>
-              <a:rPr lang="en-US" sz="1100" b="1" dirty="0">
+            <a:off x="4663440" y="2606040"/>
+            <a:ext cx="1554480" cy="274320"/>
+          </a:xfrm>
+          <a:prstGeom prst="rect">
+            <a:avLst/>
+          </a:prstGeom>
+          <a:noFill/>
+          <a:ln/>
+        </p:spPr>
+        <p:txBody>
+          <a:bodyPr wrap="square" rtlCol="0" anchor="ctr"/>
+          <a:lstStyle/>
+          <a:p>
+            <a:pPr indent="0" marL="0">
+              <a:buNone/>
+            </a:pPr>
+            <a:r>
+              <a:rPr lang="en-US" sz="1000" b="1" dirty="0">
                 <a:solidFill>
                   <a:srgbClr val="3FB950"/>
                 </a:solidFill>
@@ -13517,7 +13517,7 @@
               </a:rPr>
               <a:t>✓ Complete</a:t>
             </a:r>
-            <a:endParaRPr lang="en-US" sz="1100" dirty="0"/>
+            <a:endParaRPr lang="en-US" sz="1000" dirty="0"/>
           </a:p>
         </p:txBody>
       </p:sp>
@@ -13529,8 +13529,8 @@
         </p:nvSpPr>
         <p:spPr>
           <a:xfrm>
-            <a:off x="548640" y="3063240"/>
-            <a:ext cx="5669280" cy="365760"/>
+            <a:off x="548640" y="2907792"/>
+            <a:ext cx="5669280" cy="274320"/>
           </a:xfrm>
           <a:prstGeom prst="rect">
             <a:avLst/>
@@ -13554,24 +13554,24 @@
         </p:nvSpPr>
         <p:spPr>
           <a:xfrm>
-            <a:off x="731520" y="3063240"/>
-            <a:ext cx="3840480" cy="365760"/>
-          </a:xfrm>
-          <a:prstGeom prst="rect">
-            <a:avLst/>
-          </a:prstGeom>
-          <a:noFill/>
-          <a:ln/>
-        </p:spPr>
-        <p:txBody>
-          <a:bodyPr wrap="square" rtlCol="0" anchor="ctr"/>
-          <a:lstStyle/>
-          <a:p>
-            <a:pPr indent="0" marL="0">
-              <a:buNone/>
-            </a:pPr>
-            <a:r>
-              <a:rPr lang="en-US" sz="1100" dirty="0">
+            <a:off x="731520" y="2907792"/>
+            <a:ext cx="3840480" cy="274320"/>
+          </a:xfrm>
+          <a:prstGeom prst="rect">
+            <a:avLst/>
+          </a:prstGeom>
+          <a:noFill/>
+          <a:ln/>
+        </p:spPr>
+        <p:txBody>
+          <a:bodyPr wrap="square" rtlCol="0" anchor="ctr"/>
+          <a:lstStyle/>
+          <a:p>
+            <a:pPr indent="0" marL="0">
+              <a:buNone/>
+            </a:pPr>
+            <a:r>
+              <a:rPr lang="en-US" sz="1000" dirty="0">
                 <a:solidFill>
                   <a:srgbClr val="C9D1D9"/>
                 </a:solidFill>
@@ -13581,7 +13581,7 @@
               </a:rPr>
               <a:t>ISO 14971 Risk Management (FMEA)</a:t>
             </a:r>
-            <a:endParaRPr lang="en-US" sz="1100" dirty="0"/>
+            <a:endParaRPr lang="en-US" sz="1000" dirty="0"/>
           </a:p>
         </p:txBody>
       </p:sp>
@@ -13593,24 +13593,24 @@
         </p:nvSpPr>
         <p:spPr>
           <a:xfrm>
-            <a:off x="4663440" y="3063240"/>
-            <a:ext cx="1554480" cy="365760"/>
-          </a:xfrm>
-          <a:prstGeom prst="rect">
-            <a:avLst/>
-          </a:prstGeom>
-          <a:noFill/>
-          <a:ln/>
-        </p:spPr>
-        <p:txBody>
-          <a:bodyPr wrap="square" rtlCol="0" anchor="ctr"/>
-          <a:lstStyle/>
-          <a:p>
-            <a:pPr indent="0" marL="0">
-              <a:buNone/>
-            </a:pPr>
-            <a:r>
-              <a:rPr lang="en-US" sz="1100" b="1" dirty="0">
+            <a:off x="4663440" y="2907792"/>
+            <a:ext cx="1554480" cy="274320"/>
+          </a:xfrm>
+          <a:prstGeom prst="rect">
+            <a:avLst/>
+          </a:prstGeom>
+          <a:noFill/>
+          <a:ln/>
+        </p:spPr>
+        <p:txBody>
+          <a:bodyPr wrap="square" rtlCol="0" anchor="ctr"/>
+          <a:lstStyle/>
+          <a:p>
+            <a:pPr indent="0" marL="0">
+              <a:buNone/>
+            </a:pPr>
+            <a:r>
+              <a:rPr lang="en-US" sz="1000" b="1" dirty="0">
                 <a:solidFill>
                   <a:srgbClr val="3FB950"/>
                 </a:solidFill>
@@ -13620,7 +13620,7 @@
               </a:rPr>
               <a:t>✓ Complete</a:t>
             </a:r>
-            <a:endParaRPr lang="en-US" sz="1100" dirty="0"/>
+            <a:endParaRPr lang="en-US" sz="1000" dirty="0"/>
           </a:p>
         </p:txBody>
       </p:sp>
@@ -13632,8 +13632,8 @@
         </p:nvSpPr>
         <p:spPr>
           <a:xfrm>
-            <a:off x="548640" y="3474720"/>
-            <a:ext cx="5669280" cy="365760"/>
+            <a:off x="548640" y="3209544"/>
+            <a:ext cx="5669280" cy="274320"/>
           </a:xfrm>
           <a:prstGeom prst="rect">
             <a:avLst/>
@@ -13657,24 +13657,24 @@
         </p:nvSpPr>
         <p:spPr>
           <a:xfrm>
-            <a:off x="731520" y="3474720"/>
-            <a:ext cx="3840480" cy="365760"/>
-          </a:xfrm>
-          <a:prstGeom prst="rect">
-            <a:avLst/>
-          </a:prstGeom>
-          <a:noFill/>
-          <a:ln/>
-        </p:spPr>
-        <p:txBody>
-          <a:bodyPr wrap="square" rtlCol="0" anchor="ctr"/>
-          <a:lstStyle/>
-          <a:p>
-            <a:pPr indent="0" marL="0">
-              <a:buNone/>
-            </a:pPr>
-            <a:r>
-              <a:rPr lang="en-US" sz="1100" dirty="0">
+            <a:off x="731520" y="3209544"/>
+            <a:ext cx="3840480" cy="274320"/>
+          </a:xfrm>
+          <a:prstGeom prst="rect">
+            <a:avLst/>
+          </a:prstGeom>
+          <a:noFill/>
+          <a:ln/>
+        </p:spPr>
+        <p:txBody>
+          <a:bodyPr wrap="square" rtlCol="0" anchor="ctr"/>
+          <a:lstStyle/>
+          <a:p>
+            <a:pPr indent="0" marL="0">
+              <a:buNone/>
+            </a:pPr>
+            <a:r>
+              <a:rPr lang="en-US" sz="1000" dirty="0">
                 <a:solidFill>
                   <a:srgbClr val="C9D1D9"/>
                 </a:solidFill>
@@ -13684,7 +13684,7 @@
               </a:rPr>
               <a:t>ISO 13485 QMS Framework</a:t>
             </a:r>
-            <a:endParaRPr lang="en-US" sz="1100" dirty="0"/>
+            <a:endParaRPr lang="en-US" sz="1000" dirty="0"/>
           </a:p>
         </p:txBody>
       </p:sp>
@@ -13696,24 +13696,24 @@
         </p:nvSpPr>
         <p:spPr>
           <a:xfrm>
-            <a:off x="4663440" y="3474720"/>
-            <a:ext cx="1554480" cy="365760"/>
-          </a:xfrm>
-          <a:prstGeom prst="rect">
-            <a:avLst/>
-          </a:prstGeom>
-          <a:noFill/>
-          <a:ln/>
-        </p:spPr>
-        <p:txBody>
-          <a:bodyPr wrap="square" rtlCol="0" anchor="ctr"/>
-          <a:lstStyle/>
-          <a:p>
-            <a:pPr indent="0" marL="0">
-              <a:buNone/>
-            </a:pPr>
-            <a:r>
-              <a:rPr lang="en-US" sz="1100" b="1" dirty="0">
+            <a:off x="4663440" y="3209544"/>
+            <a:ext cx="1554480" cy="274320"/>
+          </a:xfrm>
+          <a:prstGeom prst="rect">
+            <a:avLst/>
+          </a:prstGeom>
+          <a:noFill/>
+          <a:ln/>
+        </p:spPr>
+        <p:txBody>
+          <a:bodyPr wrap="square" rtlCol="0" anchor="ctr"/>
+          <a:lstStyle/>
+          <a:p>
+            <a:pPr indent="0" marL="0">
+              <a:buNone/>
+            </a:pPr>
+            <a:r>
+              <a:rPr lang="en-US" sz="1000" b="1" dirty="0">
                 <a:solidFill>
                   <a:srgbClr val="3FB950"/>
                 </a:solidFill>
@@ -13723,7 +13723,7 @@
               </a:rPr>
               <a:t>✓ Complete</a:t>
             </a:r>
-            <a:endParaRPr lang="en-US" sz="1100" dirty="0"/>
+            <a:endParaRPr lang="en-US" sz="1000" dirty="0"/>
           </a:p>
         </p:txBody>
       </p:sp>
@@ -13735,8 +13735,8 @@
         </p:nvSpPr>
         <p:spPr>
           <a:xfrm>
-            <a:off x="548640" y="3886200"/>
-            <a:ext cx="5669280" cy="365760"/>
+            <a:off x="548640" y="3511296"/>
+            <a:ext cx="5669280" cy="274320"/>
           </a:xfrm>
           <a:prstGeom prst="rect">
             <a:avLst/>
@@ -13760,24 +13760,24 @@
         </p:nvSpPr>
         <p:spPr>
           <a:xfrm>
-            <a:off x="731520" y="3886200"/>
-            <a:ext cx="3840480" cy="365760"/>
-          </a:xfrm>
-          <a:prstGeom prst="rect">
-            <a:avLst/>
-          </a:prstGeom>
-          <a:noFill/>
-          <a:ln/>
-        </p:spPr>
-        <p:txBody>
-          <a:bodyPr wrap="square" rtlCol="0" anchor="ctr"/>
-          <a:lstStyle/>
-          <a:p>
-            <a:pPr indent="0" marL="0">
-              <a:buNone/>
-            </a:pPr>
-            <a:r>
-              <a:rPr lang="en-US" sz="1100" dirty="0">
+            <a:off x="731520" y="3511296"/>
+            <a:ext cx="3840480" cy="274320"/>
+          </a:xfrm>
+          <a:prstGeom prst="rect">
+            <a:avLst/>
+          </a:prstGeom>
+          <a:noFill/>
+          <a:ln/>
+        </p:spPr>
+        <p:txBody>
+          <a:bodyPr wrap="square" rtlCol="0" anchor="ctr"/>
+          <a:lstStyle/>
+          <a:p>
+            <a:pPr indent="0" marL="0">
+              <a:buNone/>
+            </a:pPr>
+            <a:r>
+              <a:rPr lang="en-US" sz="1000" dirty="0">
                 <a:solidFill>
                   <a:srgbClr val="C9D1D9"/>
                 </a:solidFill>
@@ -13787,7 +13787,7 @@
               </a:rPr>
               <a:t>21 CFR Part 11 Electronic Records</a:t>
             </a:r>
-            <a:endParaRPr lang="en-US" sz="1100" dirty="0"/>
+            <a:endParaRPr lang="en-US" sz="1000" dirty="0"/>
           </a:p>
         </p:txBody>
       </p:sp>
@@ -13799,24 +13799,24 @@
         </p:nvSpPr>
         <p:spPr>
           <a:xfrm>
-            <a:off x="4663440" y="3886200"/>
-            <a:ext cx="1554480" cy="365760"/>
-          </a:xfrm>
-          <a:prstGeom prst="rect">
-            <a:avLst/>
-          </a:prstGeom>
-          <a:noFill/>
-          <a:ln/>
-        </p:spPr>
-        <p:txBody>
-          <a:bodyPr wrap="square" rtlCol="0" anchor="ctr"/>
-          <a:lstStyle/>
-          <a:p>
-            <a:pPr indent="0" marL="0">
-              <a:buNone/>
-            </a:pPr>
-            <a:r>
-              <a:rPr lang="en-US" sz="1100" b="1" dirty="0">
+            <a:off x="4663440" y="3511296"/>
+            <a:ext cx="1554480" cy="274320"/>
+          </a:xfrm>
+          <a:prstGeom prst="rect">
+            <a:avLst/>
+          </a:prstGeom>
+          <a:noFill/>
+          <a:ln/>
+        </p:spPr>
+        <p:txBody>
+          <a:bodyPr wrap="square" rtlCol="0" anchor="ctr"/>
+          <a:lstStyle/>
+          <a:p>
+            <a:pPr indent="0" marL="0">
+              <a:buNone/>
+            </a:pPr>
+            <a:r>
+              <a:rPr lang="en-US" sz="1000" b="1" dirty="0">
                 <a:solidFill>
                   <a:srgbClr val="3FB950"/>
                 </a:solidFill>
@@ -13826,7 +13826,7 @@
               </a:rPr>
               <a:t>✓ Complete</a:t>
             </a:r>
-            <a:endParaRPr lang="en-US" sz="1100" dirty="0"/>
+            <a:endParaRPr lang="en-US" sz="1000" dirty="0"/>
           </a:p>
         </p:txBody>
       </p:sp>
@@ -13838,8 +13838,8 @@
         </p:nvSpPr>
         <p:spPr>
           <a:xfrm>
-            <a:off x="548640" y="4297680"/>
-            <a:ext cx="5669280" cy="365760"/>
+            <a:off x="548640" y="3813048"/>
+            <a:ext cx="5669280" cy="274320"/>
           </a:xfrm>
           <a:prstGeom prst="rect">
             <a:avLst/>
@@ -13863,24 +13863,24 @@
         </p:nvSpPr>
         <p:spPr>
           <a:xfrm>
-            <a:off x="731520" y="4297680"/>
-            <a:ext cx="3840480" cy="365760"/>
-          </a:xfrm>
-          <a:prstGeom prst="rect">
-            <a:avLst/>
-          </a:prstGeom>
-          <a:noFill/>
-          <a:ln/>
-        </p:spPr>
-        <p:txBody>
-          <a:bodyPr wrap="square" rtlCol="0" anchor="ctr"/>
-          <a:lstStyle/>
-          <a:p>
-            <a:pPr indent="0" marL="0">
-              <a:buNone/>
-            </a:pPr>
-            <a:r>
-              <a:rPr lang="en-US" sz="1100" dirty="0">
+            <a:off x="731520" y="3813048"/>
+            <a:ext cx="3840480" cy="274320"/>
+          </a:xfrm>
+          <a:prstGeom prst="rect">
+            <a:avLst/>
+          </a:prstGeom>
+          <a:noFill/>
+          <a:ln/>
+        </p:spPr>
+        <p:txBody>
+          <a:bodyPr wrap="square" rtlCol="0" anchor="ctr"/>
+          <a:lstStyle/>
+          <a:p>
+            <a:pPr indent="0" marL="0">
+              <a:buNone/>
+            </a:pPr>
+            <a:r>
+              <a:rPr lang="en-US" sz="1000" dirty="0">
                 <a:solidFill>
                   <a:srgbClr val="C9D1D9"/>
                 </a:solidFill>
@@ -13890,7 +13890,7 @@
               </a:rPr>
               <a:t>STRIDE Cybersecurity Assessment</a:t>
             </a:r>
-            <a:endParaRPr lang="en-US" sz="1100" dirty="0"/>
+            <a:endParaRPr lang="en-US" sz="1000" dirty="0"/>
           </a:p>
         </p:txBody>
       </p:sp>
@@ -13902,24 +13902,24 @@
         </p:nvSpPr>
         <p:spPr>
           <a:xfrm>
-            <a:off x="4663440" y="4297680"/>
-            <a:ext cx="1554480" cy="365760"/>
-          </a:xfrm>
-          <a:prstGeom prst="rect">
-            <a:avLst/>
-          </a:prstGeom>
-          <a:noFill/>
-          <a:ln/>
-        </p:spPr>
-        <p:txBody>
-          <a:bodyPr wrap="square" rtlCol="0" anchor="ctr"/>
-          <a:lstStyle/>
-          <a:p>
-            <a:pPr indent="0" marL="0">
-              <a:buNone/>
-            </a:pPr>
-            <a:r>
-              <a:rPr lang="en-US" sz="1100" b="1" dirty="0">
+            <a:off x="4663440" y="3813048"/>
+            <a:ext cx="1554480" cy="274320"/>
+          </a:xfrm>
+          <a:prstGeom prst="rect">
+            <a:avLst/>
+          </a:prstGeom>
+          <a:noFill/>
+          <a:ln/>
+        </p:spPr>
+        <p:txBody>
+          <a:bodyPr wrap="square" rtlCol="0" anchor="ctr"/>
+          <a:lstStyle/>
+          <a:p>
+            <a:pPr indent="0" marL="0">
+              <a:buNone/>
+            </a:pPr>
+            <a:r>
+              <a:rPr lang="en-US" sz="1000" b="1" dirty="0">
                 <a:solidFill>
                   <a:srgbClr val="3FB950"/>
                 </a:solidFill>
@@ -13929,7 +13929,7 @@
               </a:rPr>
               <a:t>✓ Complete</a:t>
             </a:r>
-            <a:endParaRPr lang="en-US" sz="1100" dirty="0"/>
+            <a:endParaRPr lang="en-US" sz="1000" dirty="0"/>
           </a:p>
         </p:txBody>
       </p:sp>
@@ -13941,8 +13941,8 @@
         </p:nvSpPr>
         <p:spPr>
           <a:xfrm>
-            <a:off x="548640" y="4709160"/>
-            <a:ext cx="5669280" cy="365760"/>
+            <a:off x="548640" y="4114800"/>
+            <a:ext cx="5669280" cy="274320"/>
           </a:xfrm>
           <a:prstGeom prst="rect">
             <a:avLst/>
@@ -13966,24 +13966,24 @@
         </p:nvSpPr>
         <p:spPr>
           <a:xfrm>
-            <a:off x="731520" y="4709160"/>
-            <a:ext cx="3840480" cy="365760"/>
-          </a:xfrm>
-          <a:prstGeom prst="rect">
-            <a:avLst/>
-          </a:prstGeom>
-          <a:noFill/>
-          <a:ln/>
-        </p:spPr>
-        <p:txBody>
-          <a:bodyPr wrap="square" rtlCol="0" anchor="ctr"/>
-          <a:lstStyle/>
-          <a:p>
-            <a:pPr indent="0" marL="0">
-              <a:buNone/>
-            </a:pPr>
-            <a:r>
-              <a:rPr lang="en-US" sz="1100" dirty="0">
+            <a:off x="731520" y="4114800"/>
+            <a:ext cx="3840480" cy="274320"/>
+          </a:xfrm>
+          <a:prstGeom prst="rect">
+            <a:avLst/>
+          </a:prstGeom>
+          <a:noFill/>
+          <a:ln/>
+        </p:spPr>
+        <p:txBody>
+          <a:bodyPr wrap="square" rtlCol="0" anchor="ctr"/>
+          <a:lstStyle/>
+          <a:p>
+            <a:pPr indent="0" marL="0">
+              <a:buNone/>
+            </a:pPr>
+            <a:r>
+              <a:rPr lang="en-US" sz="1000" dirty="0">
                 <a:solidFill>
                   <a:srgbClr val="C9D1D9"/>
                 </a:solidFill>
@@ -13993,7 +13993,7 @@
               </a:rPr>
               <a:t>Algorithm Transparency Module</a:t>
             </a:r>
-            <a:endParaRPr lang="en-US" sz="1100" dirty="0"/>
+            <a:endParaRPr lang="en-US" sz="1000" dirty="0"/>
           </a:p>
         </p:txBody>
       </p:sp>
@@ -14005,24 +14005,24 @@
         </p:nvSpPr>
         <p:spPr>
           <a:xfrm>
-            <a:off x="4663440" y="4709160"/>
-            <a:ext cx="1554480" cy="365760"/>
-          </a:xfrm>
-          <a:prstGeom prst="rect">
-            <a:avLst/>
-          </a:prstGeom>
-          <a:noFill/>
-          <a:ln/>
-        </p:spPr>
-        <p:txBody>
-          <a:bodyPr wrap="square" rtlCol="0" anchor="ctr"/>
-          <a:lstStyle/>
-          <a:p>
-            <a:pPr indent="0" marL="0">
-              <a:buNone/>
-            </a:pPr>
-            <a:r>
-              <a:rPr lang="en-US" sz="1100" b="1" dirty="0">
+            <a:off x="4663440" y="4114800"/>
+            <a:ext cx="1554480" cy="274320"/>
+          </a:xfrm>
+          <a:prstGeom prst="rect">
+            <a:avLst/>
+          </a:prstGeom>
+          <a:noFill/>
+          <a:ln/>
+        </p:spPr>
+        <p:txBody>
+          <a:bodyPr wrap="square" rtlCol="0" anchor="ctr"/>
+          <a:lstStyle/>
+          <a:p>
+            <a:pPr indent="0" marL="0">
+              <a:buNone/>
+            </a:pPr>
+            <a:r>
+              <a:rPr lang="en-US" sz="1000" b="1" dirty="0">
                 <a:solidFill>
                   <a:srgbClr val="3FB950"/>
                 </a:solidFill>
@@ -14032,7 +14032,7 @@
               </a:rPr>
               <a:t>✓ Complete</a:t>
             </a:r>
-            <a:endParaRPr lang="en-US" sz="1100" dirty="0"/>
+            <a:endParaRPr lang="en-US" sz="1000" dirty="0"/>
           </a:p>
         </p:txBody>
       </p:sp>
@@ -14044,8 +14044,8 @@
         </p:nvSpPr>
         <p:spPr>
           <a:xfrm>
-            <a:off x="548640" y="5120640"/>
-            <a:ext cx="5669280" cy="365760"/>
+            <a:off x="548640" y="4416552"/>
+            <a:ext cx="5669280" cy="274320"/>
           </a:xfrm>
           <a:prstGeom prst="rect">
             <a:avLst/>
@@ -14069,24 +14069,24 @@
         </p:nvSpPr>
         <p:spPr>
           <a:xfrm>
-            <a:off x="731520" y="5120640"/>
-            <a:ext cx="3840480" cy="365760"/>
-          </a:xfrm>
-          <a:prstGeom prst="rect">
-            <a:avLst/>
-          </a:prstGeom>
-          <a:noFill/>
-          <a:ln/>
-        </p:spPr>
-        <p:txBody>
-          <a:bodyPr wrap="square" rtlCol="0" anchor="ctr"/>
-          <a:lstStyle/>
-          <a:p>
-            <a:pPr indent="0" marL="0">
-              <a:buNone/>
-            </a:pPr>
-            <a:r>
-              <a:rPr lang="en-US" sz="1100" dirty="0">
+            <a:off x="731520" y="4416552"/>
+            <a:ext cx="3840480" cy="274320"/>
+          </a:xfrm>
+          <a:prstGeom prst="rect">
+            <a:avLst/>
+          </a:prstGeom>
+          <a:noFill/>
+          <a:ln/>
+        </p:spPr>
+        <p:txBody>
+          <a:bodyPr wrap="square" rtlCol="0" anchor="ctr"/>
+          <a:lstStyle/>
+          <a:p>
+            <a:pPr indent="0" marL="0">
+              <a:buNone/>
+            </a:pPr>
+            <a:r>
+              <a:rPr lang="en-US" sz="1000" dirty="0">
                 <a:solidFill>
                   <a:srgbClr val="C9D1D9"/>
                 </a:solidFill>
@@ -14094,9 +14094,9 @@
                 <a:ea typeface="Calibri" pitchFamily="34" charset="-122"/>
                 <a:cs typeface="Calibri" pitchFamily="34" charset="-120"/>
               </a:rPr>
-              <a:t>Clinical Validation Protocol</a:t>
-            </a:r>
-            <a:endParaRPr lang="en-US" sz="1100" dirty="0"/>
+              <a:t>Clinical Validation Protocol (CVP-001)</a:t>
+            </a:r>
+            <a:endParaRPr lang="en-US" sz="1000" dirty="0"/>
           </a:p>
         </p:txBody>
       </p:sp>
@@ -14108,24 +14108,24 @@
         </p:nvSpPr>
         <p:spPr>
           <a:xfrm>
-            <a:off x="4663440" y="5120640"/>
-            <a:ext cx="1554480" cy="365760"/>
-          </a:xfrm>
-          <a:prstGeom prst="rect">
-            <a:avLst/>
-          </a:prstGeom>
-          <a:noFill/>
-          <a:ln/>
-        </p:spPr>
-        <p:txBody>
-          <a:bodyPr wrap="square" rtlCol="0" anchor="ctr"/>
-          <a:lstStyle/>
-          <a:p>
-            <a:pPr indent="0" marL="0">
-              <a:buNone/>
-            </a:pPr>
-            <a:r>
-              <a:rPr lang="en-US" sz="1100" b="1" dirty="0">
+            <a:off x="4663440" y="4416552"/>
+            <a:ext cx="1554480" cy="274320"/>
+          </a:xfrm>
+          <a:prstGeom prst="rect">
+            <a:avLst/>
+          </a:prstGeom>
+          <a:noFill/>
+          <a:ln/>
+        </p:spPr>
+        <p:txBody>
+          <a:bodyPr wrap="square" rtlCol="0" anchor="ctr"/>
+          <a:lstStyle/>
+          <a:p>
+            <a:pPr indent="0" marL="0">
+              <a:buNone/>
+            </a:pPr>
+            <a:r>
+              <a:rPr lang="en-US" sz="1000" b="1" dirty="0">
                 <a:solidFill>
                   <a:srgbClr val="3FB950"/>
                 </a:solidFill>
@@ -14133,9 +14133,9 @@
                 <a:ea typeface="Calibri" pitchFamily="34" charset="-122"/>
                 <a:cs typeface="Calibri" pitchFamily="34" charset="-120"/>
               </a:rPr>
-              <a:t>✓ Drafted</a:t>
-            </a:r>
-            <a:endParaRPr lang="en-US" sz="1100" dirty="0"/>
+              <a:t>✓ Complete</a:t>
+            </a:r>
+            <a:endParaRPr lang="en-US" sz="1000" dirty="0"/>
           </a:p>
         </p:txBody>
       </p:sp>
@@ -14147,8 +14147,8 @@
         </p:nvSpPr>
         <p:spPr>
           <a:xfrm>
-            <a:off x="548640" y="5532120"/>
-            <a:ext cx="5669280" cy="365760"/>
+            <a:off x="548640" y="4718304"/>
+            <a:ext cx="5669280" cy="274320"/>
           </a:xfrm>
           <a:prstGeom prst="rect">
             <a:avLst/>
@@ -14172,24 +14172,24 @@
         </p:nvSpPr>
         <p:spPr>
           <a:xfrm>
-            <a:off x="731520" y="5532120"/>
-            <a:ext cx="3840480" cy="365760"/>
-          </a:xfrm>
-          <a:prstGeom prst="rect">
-            <a:avLst/>
-          </a:prstGeom>
-          <a:noFill/>
-          <a:ln/>
-        </p:spPr>
-        <p:txBody>
-          <a:bodyPr wrap="square" rtlCol="0" anchor="ctr"/>
-          <a:lstStyle/>
-          <a:p>
-            <a:pPr indent="0" marL="0">
-              <a:buNone/>
-            </a:pPr>
-            <a:r>
-              <a:rPr lang="en-US" sz="1100" dirty="0">
+            <a:off x="731520" y="4718304"/>
+            <a:ext cx="3840480" cy="274320"/>
+          </a:xfrm>
+          <a:prstGeom prst="rect">
+            <a:avLst/>
+          </a:prstGeom>
+          <a:noFill/>
+          <a:ln/>
+        </p:spPr>
+        <p:txBody>
+          <a:bodyPr wrap="square" rtlCol="0" anchor="ctr"/>
+          <a:lstStyle/>
+          <a:p>
+            <a:pPr indent="0" marL="0">
+              <a:buNone/>
+            </a:pPr>
+            <a:r>
+              <a:rPr lang="en-US" sz="1000" dirty="0">
                 <a:solidFill>
                   <a:srgbClr val="C9D1D9"/>
                 </a:solidFill>
@@ -14197,9 +14197,9 @@
                 <a:ea typeface="Calibri" pitchFamily="34" charset="-122"/>
                 <a:cs typeface="Calibri" pitchFamily="34" charset="-120"/>
               </a:rPr>
-              <a:t>510(k) Predicate Analysis</a:t>
-            </a:r>
-            <a:endParaRPr lang="en-US" sz="1100" dirty="0"/>
+              <a:t>Informed Consent Template (ICF-001)</a:t>
+            </a:r>
+            <a:endParaRPr lang="en-US" sz="1000" dirty="0"/>
           </a:p>
         </p:txBody>
       </p:sp>
@@ -14211,24 +14211,24 @@
         </p:nvSpPr>
         <p:spPr>
           <a:xfrm>
-            <a:off x="4663440" y="5532120"/>
-            <a:ext cx="1554480" cy="365760"/>
-          </a:xfrm>
-          <a:prstGeom prst="rect">
-            <a:avLst/>
-          </a:prstGeom>
-          <a:noFill/>
-          <a:ln/>
-        </p:spPr>
-        <p:txBody>
-          <a:bodyPr wrap="square" rtlCol="0" anchor="ctr"/>
-          <a:lstStyle/>
-          <a:p>
-            <a:pPr indent="0" marL="0">
-              <a:buNone/>
-            </a:pPr>
-            <a:r>
-              <a:rPr lang="en-US" sz="1100" b="1" dirty="0">
+            <a:off x="4663440" y="4718304"/>
+            <a:ext cx="1554480" cy="274320"/>
+          </a:xfrm>
+          <a:prstGeom prst="rect">
+            <a:avLst/>
+          </a:prstGeom>
+          <a:noFill/>
+          <a:ln/>
+        </p:spPr>
+        <p:txBody>
+          <a:bodyPr wrap="square" rtlCol="0" anchor="ctr"/>
+          <a:lstStyle/>
+          <a:p>
+            <a:pPr indent="0" marL="0">
+              <a:buNone/>
+            </a:pPr>
+            <a:r>
+              <a:rPr lang="en-US" sz="1000" b="1" dirty="0">
                 <a:solidFill>
                   <a:srgbClr val="3FB950"/>
                 </a:solidFill>
@@ -14236,15 +14236,324 @@
                 <a:ea typeface="Calibri" pitchFamily="34" charset="-122"/>
                 <a:cs typeface="Calibri" pitchFamily="34" charset="-120"/>
               </a:rPr>
+              <a:t>✓ Complete</a:t>
+            </a:r>
+            <a:endParaRPr lang="en-US" sz="1000" dirty="0"/>
+          </a:p>
+        </p:txBody>
+      </p:sp>
+      <p:sp>
+        <p:nvSpPr>
+          <p:cNvPr id="29" name="Shape 27"/>
+          <p:cNvSpPr/>
+          <p:nvPr/>
+        </p:nvSpPr>
+        <p:spPr>
+          <a:xfrm>
+            <a:off x="548640" y="5020056"/>
+            <a:ext cx="5669280" cy="274320"/>
+          </a:xfrm>
+          <a:prstGeom prst="rect">
+            <a:avLst/>
+          </a:prstGeom>
+          <a:solidFill>
+            <a:srgbClr val="0D1117"/>
+          </a:solidFill>
+          <a:ln w="6350">
+            <a:solidFill>
+              <a:srgbClr val="21262D"/>
+            </a:solidFill>
+            <a:prstDash val="solid"/>
+          </a:ln>
+        </p:spPr>
+      </p:sp>
+      <p:sp>
+        <p:nvSpPr>
+          <p:cNvPr id="30" name="Text 28"/>
+          <p:cNvSpPr/>
+          <p:nvPr/>
+        </p:nvSpPr>
+        <p:spPr>
+          <a:xfrm>
+            <a:off x="731520" y="5020056"/>
+            <a:ext cx="3840480" cy="274320"/>
+          </a:xfrm>
+          <a:prstGeom prst="rect">
+            <a:avLst/>
+          </a:prstGeom>
+          <a:noFill/>
+          <a:ln/>
+        </p:spPr>
+        <p:txBody>
+          <a:bodyPr wrap="square" rtlCol="0" anchor="ctr"/>
+          <a:lstStyle/>
+          <a:p>
+            <a:pPr indent="0" marL="0">
+              <a:buNone/>
+            </a:pPr>
+            <a:r>
+              <a:rPr lang="en-US" sz="1000" dirty="0">
+                <a:solidFill>
+                  <a:srgbClr val="C9D1D9"/>
+                </a:solidFill>
+                <a:latin typeface="Calibri" pitchFamily="34" charset="0"/>
+                <a:ea typeface="Calibri" pitchFamily="34" charset="-122"/>
+                <a:cs typeface="Calibri" pitchFamily="34" charset="-120"/>
+              </a:rPr>
+              <a:t>Data Management Plan (DMP-001)</a:t>
+            </a:r>
+            <a:endParaRPr lang="en-US" sz="1000" dirty="0"/>
+          </a:p>
+        </p:txBody>
+      </p:sp>
+      <p:sp>
+        <p:nvSpPr>
+          <p:cNvPr id="31" name="Text 29"/>
+          <p:cNvSpPr/>
+          <p:nvPr/>
+        </p:nvSpPr>
+        <p:spPr>
+          <a:xfrm>
+            <a:off x="4663440" y="5020056"/>
+            <a:ext cx="1554480" cy="274320"/>
+          </a:xfrm>
+          <a:prstGeom prst="rect">
+            <a:avLst/>
+          </a:prstGeom>
+          <a:noFill/>
+          <a:ln/>
+        </p:spPr>
+        <p:txBody>
+          <a:bodyPr wrap="square" rtlCol="0" anchor="ctr"/>
+          <a:lstStyle/>
+          <a:p>
+            <a:pPr indent="0" marL="0">
+              <a:buNone/>
+            </a:pPr>
+            <a:r>
+              <a:rPr lang="en-US" sz="1000" b="1" dirty="0">
+                <a:solidFill>
+                  <a:srgbClr val="3FB950"/>
+                </a:solidFill>
+                <a:latin typeface="Calibri" pitchFamily="34" charset="0"/>
+                <a:ea typeface="Calibri" pitchFamily="34" charset="-122"/>
+                <a:cs typeface="Calibri" pitchFamily="34" charset="-120"/>
+              </a:rPr>
+              <a:t>✓ Complete</a:t>
+            </a:r>
+            <a:endParaRPr lang="en-US" sz="1000" dirty="0"/>
+          </a:p>
+        </p:txBody>
+      </p:sp>
+      <p:sp>
+        <p:nvSpPr>
+          <p:cNvPr id="32" name="Shape 30"/>
+          <p:cNvSpPr/>
+          <p:nvPr/>
+        </p:nvSpPr>
+        <p:spPr>
+          <a:xfrm>
+            <a:off x="548640" y="5321808"/>
+            <a:ext cx="5669280" cy="274320"/>
+          </a:xfrm>
+          <a:prstGeom prst="rect">
+            <a:avLst/>
+          </a:prstGeom>
+          <a:solidFill>
+            <a:srgbClr val="0A0E1A"/>
+          </a:solidFill>
+          <a:ln w="6350">
+            <a:solidFill>
+              <a:srgbClr val="21262D"/>
+            </a:solidFill>
+            <a:prstDash val="solid"/>
+          </a:ln>
+        </p:spPr>
+      </p:sp>
+      <p:sp>
+        <p:nvSpPr>
+          <p:cNvPr id="33" name="Text 31"/>
+          <p:cNvSpPr/>
+          <p:nvPr/>
+        </p:nvSpPr>
+        <p:spPr>
+          <a:xfrm>
+            <a:off x="731520" y="5321808"/>
+            <a:ext cx="3840480" cy="274320"/>
+          </a:xfrm>
+          <a:prstGeom prst="rect">
+            <a:avLst/>
+          </a:prstGeom>
+          <a:noFill/>
+          <a:ln/>
+        </p:spPr>
+        <p:txBody>
+          <a:bodyPr wrap="square" rtlCol="0" anchor="ctr"/>
+          <a:lstStyle/>
+          <a:p>
+            <a:pPr indent="0" marL="0">
+              <a:buNone/>
+            </a:pPr>
+            <a:r>
+              <a:rPr lang="en-US" sz="1000" dirty="0">
+                <a:solidFill>
+                  <a:srgbClr val="C9D1D9"/>
+                </a:solidFill>
+                <a:latin typeface="Calibri" pitchFamily="34" charset="0"/>
+                <a:ea typeface="Calibri" pitchFamily="34" charset="-122"/>
+                <a:cs typeface="Calibri" pitchFamily="34" charset="-120"/>
+              </a:rPr>
+              <a:t>Safety Monitoring Plan (SMP-001)</a:t>
+            </a:r>
+            <a:endParaRPr lang="en-US" sz="1000" dirty="0"/>
+          </a:p>
+        </p:txBody>
+      </p:sp>
+      <p:sp>
+        <p:nvSpPr>
+          <p:cNvPr id="34" name="Text 32"/>
+          <p:cNvSpPr/>
+          <p:nvPr/>
+        </p:nvSpPr>
+        <p:spPr>
+          <a:xfrm>
+            <a:off x="4663440" y="5321808"/>
+            <a:ext cx="1554480" cy="274320"/>
+          </a:xfrm>
+          <a:prstGeom prst="rect">
+            <a:avLst/>
+          </a:prstGeom>
+          <a:noFill/>
+          <a:ln/>
+        </p:spPr>
+        <p:txBody>
+          <a:bodyPr wrap="square" rtlCol="0" anchor="ctr"/>
+          <a:lstStyle/>
+          <a:p>
+            <a:pPr indent="0" marL="0">
+              <a:buNone/>
+            </a:pPr>
+            <a:r>
+              <a:rPr lang="en-US" sz="1000" b="1" dirty="0">
+                <a:solidFill>
+                  <a:srgbClr val="3FB950"/>
+                </a:solidFill>
+                <a:latin typeface="Calibri" pitchFamily="34" charset="0"/>
+                <a:ea typeface="Calibri" pitchFamily="34" charset="-122"/>
+                <a:cs typeface="Calibri" pitchFamily="34" charset="-120"/>
+              </a:rPr>
+              <a:t>✓ Complete</a:t>
+            </a:r>
+            <a:endParaRPr lang="en-US" sz="1000" dirty="0"/>
+          </a:p>
+        </p:txBody>
+      </p:sp>
+      <p:sp>
+        <p:nvSpPr>
+          <p:cNvPr id="35" name="Shape 33"/>
+          <p:cNvSpPr/>
+          <p:nvPr/>
+        </p:nvSpPr>
+        <p:spPr>
+          <a:xfrm>
+            <a:off x="548640" y="5623560"/>
+            <a:ext cx="5669280" cy="274320"/>
+          </a:xfrm>
+          <a:prstGeom prst="rect">
+            <a:avLst/>
+          </a:prstGeom>
+          <a:solidFill>
+            <a:srgbClr val="0D1117"/>
+          </a:solidFill>
+          <a:ln w="6350">
+            <a:solidFill>
+              <a:srgbClr val="21262D"/>
+            </a:solidFill>
+            <a:prstDash val="solid"/>
+          </a:ln>
+        </p:spPr>
+      </p:sp>
+      <p:sp>
+        <p:nvSpPr>
+          <p:cNvPr id="36" name="Text 34"/>
+          <p:cNvSpPr/>
+          <p:nvPr/>
+        </p:nvSpPr>
+        <p:spPr>
+          <a:xfrm>
+            <a:off x="731520" y="5623560"/>
+            <a:ext cx="3840480" cy="274320"/>
+          </a:xfrm>
+          <a:prstGeom prst="rect">
+            <a:avLst/>
+          </a:prstGeom>
+          <a:noFill/>
+          <a:ln/>
+        </p:spPr>
+        <p:txBody>
+          <a:bodyPr wrap="square" rtlCol="0" anchor="ctr"/>
+          <a:lstStyle/>
+          <a:p>
+            <a:pPr indent="0" marL="0">
+              <a:buNone/>
+            </a:pPr>
+            <a:r>
+              <a:rPr lang="en-US" sz="1000" dirty="0">
+                <a:solidFill>
+                  <a:srgbClr val="C9D1D9"/>
+                </a:solidFill>
+                <a:latin typeface="Calibri" pitchFamily="34" charset="0"/>
+                <a:ea typeface="Calibri" pitchFamily="34" charset="-122"/>
+                <a:cs typeface="Calibri" pitchFamily="34" charset="-120"/>
+              </a:rPr>
+              <a:t>510(k) Predicate Analysis</a:t>
+            </a:r>
+            <a:endParaRPr lang="en-US" sz="1000" dirty="0"/>
+          </a:p>
+        </p:txBody>
+      </p:sp>
+      <p:sp>
+        <p:nvSpPr>
+          <p:cNvPr id="37" name="Text 35"/>
+          <p:cNvSpPr/>
+          <p:nvPr/>
+        </p:nvSpPr>
+        <p:spPr>
+          <a:xfrm>
+            <a:off x="4663440" y="5623560"/>
+            <a:ext cx="1554480" cy="274320"/>
+          </a:xfrm>
+          <a:prstGeom prst="rect">
+            <a:avLst/>
+          </a:prstGeom>
+          <a:noFill/>
+          <a:ln/>
+        </p:spPr>
+        <p:txBody>
+          <a:bodyPr wrap="square" rtlCol="0" anchor="ctr"/>
+          <a:lstStyle/>
+          <a:p>
+            <a:pPr indent="0" marL="0">
+              <a:buNone/>
+            </a:pPr>
+            <a:r>
+              <a:rPr lang="en-US" sz="1000" b="1" dirty="0">
+                <a:solidFill>
+                  <a:srgbClr val="3FB950"/>
+                </a:solidFill>
+                <a:latin typeface="Calibri" pitchFamily="34" charset="0"/>
+                <a:ea typeface="Calibri" pitchFamily="34" charset="-122"/>
+                <a:cs typeface="Calibri" pitchFamily="34" charset="-120"/>
+              </a:rPr>
               <a:t>✓ K201738 Linus Health</a:t>
             </a:r>
-            <a:endParaRPr lang="en-US" sz="1100" dirty="0"/>
-          </a:p>
-        </p:txBody>
-      </p:sp>
-      <p:sp>
-        <p:nvSpPr>
-          <p:cNvPr id="29" name="Text 27"/>
+            <a:endParaRPr lang="en-US" sz="1000" dirty="0"/>
+          </a:p>
+        </p:txBody>
+      </p:sp>
+      <p:sp>
+        <p:nvSpPr>
+          <p:cNvPr id="38" name="Text 36"/>
           <p:cNvSpPr/>
           <p:nvPr/>
         </p:nvSpPr>
@@ -14280,7 +14589,7 @@
       </p:sp>
       <p:sp>
         <p:nvSpPr>
-          <p:cNvPr id="30" name="Shape 28"/>
+          <p:cNvPr id="39" name="Shape 37"/>
           <p:cNvSpPr/>
           <p:nvPr/>
         </p:nvSpPr>
@@ -14305,7 +14614,7 @@
       </p:sp>
       <p:sp>
         <p:nvSpPr>
-          <p:cNvPr id="31" name="Text 29"/>
+          <p:cNvPr id="40" name="Text 38"/>
           <p:cNvSpPr/>
           <p:nvPr/>
         </p:nvSpPr>
@@ -14361,7 +14670,7 @@
       </p:sp>
       <p:sp>
         <p:nvSpPr>
-          <p:cNvPr id="32" name="Shape 30"/>
+          <p:cNvPr id="41" name="Shape 39"/>
           <p:cNvSpPr/>
           <p:nvPr/>
         </p:nvSpPr>
@@ -14386,7 +14695,7 @@
       </p:sp>
       <p:sp>
         <p:nvSpPr>
-          <p:cNvPr id="33" name="Text 31"/>
+          <p:cNvPr id="42" name="Text 40"/>
           <p:cNvSpPr/>
           <p:nvPr/>
         </p:nvSpPr>
@@ -14442,7 +14751,7 @@
       </p:sp>
       <p:sp>
         <p:nvSpPr>
-          <p:cNvPr id="34" name="Text 32"/>
+          <p:cNvPr id="43" name="Text 41"/>
           <p:cNvSpPr/>
           <p:nvPr/>
         </p:nvSpPr>
@@ -14526,7 +14835,7 @@
       </p:sp>
       <p:sp>
         <p:nvSpPr>
-          <p:cNvPr id="35" name="Shape 33"/>
+          <p:cNvPr id="44" name="Shape 42"/>
           <p:cNvSpPr/>
           <p:nvPr/>
         </p:nvSpPr>
@@ -14551,7 +14860,7 @@
       </p:sp>
       <p:sp>
         <p:nvSpPr>
-          <p:cNvPr id="36" name="Text 34"/>
+          <p:cNvPr id="45" name="Text 43"/>
           <p:cNvSpPr/>
           <p:nvPr/>
         </p:nvSpPr>

--- a/apps/pitch-site/public/Gentle-Reminder-Pitch-Deck.pptx
+++ b/apps/pitch-site/public/Gentle-Reminder-Pitch-Deck.pptx
@@ -2484,7 +2484,7 @@
                 <a:ea typeface="Calibri" pitchFamily="34" charset="-122"/>
                 <a:cs typeface="Calibri" pitchFamily="34" charset="-120"/>
               </a:rPr>
-              <a:t>Christo Mac</a:t>
+              <a:t>Christo Mack</a:t>
             </a:r>
             <a:endParaRPr lang="en-US" sz="1800" dirty="0"/>
           </a:p>
@@ -6401,7 +6401,7 @@
                 <a:ea typeface="Arial" pitchFamily="34" charset="-122"/>
                 <a:cs typeface="Arial" pitchFamily="34" charset="-120"/>
               </a:rPr>
-              <a:t>Christo Mac</a:t>
+              <a:t>Christo Mack</a:t>
             </a:r>
             <a:endParaRPr lang="en-US" sz="1500" dirty="0"/>
           </a:p>
@@ -9717,7 +9717,7 @@
                 <a:ea typeface="Arial" pitchFamily="34" charset="-122"/>
                 <a:cs typeface="Arial" pitchFamily="34" charset="-120"/>
               </a:rPr>
-              <a:t>Christo Mac</a:t>
+              <a:t>Christo Mack</a:t>
             </a:r>
             <a:endParaRPr lang="en-US" sz="2200" dirty="0"/>
           </a:p>

--- a/apps/pitch-site/public/Gentle-Reminder-Pitch-Deck.pptx
+++ b/apps/pitch-site/public/Gentle-Reminder-Pitch-Deck.pptx
@@ -2518,7 +2518,7 @@
                 <a:ea typeface="Calibri" pitchFamily="34" charset="-122"/>
                 <a:cs typeface="Calibri" pitchFamily="34" charset="-120"/>
               </a:rPr>
-              <a:t>mack@matrixadvancedsolutions.com  ·  https://gentle-reminder-pitch.vercel.app</a:t>
+              <a:t>gentlereminderapp@gmail.com  ·  https://gentle-reminder-pitch.vercel.app</a:t>
             </a:r>
             <a:endParaRPr lang="en-US" sz="1800" dirty="0"/>
           </a:p>
@@ -9798,7 +9798,7 @@
                 <a:ea typeface="Calibri" pitchFamily="34" charset="-122"/>
                 <a:cs typeface="Calibri" pitchFamily="34" charset="-120"/>
               </a:rPr>
-              <a:t>mack@matrixadvancedsolutions.com</a:t>
+              <a:t>gentlereminderapp@gmail.com</a:t>
             </a:r>
             <a:endParaRPr lang="en-US" sz="1100" dirty="0"/>
           </a:p>
